--- a/项目展示PPT_Steam游戏生态.pptx
+++ b/项目展示PPT_Steam游戏生态.pptx
@@ -3141,7 +3141,12 @@
           </a:p>
           <a:p>
             <a:r>
-              <a:t>《大数据原理与应用》中期作业 · 组员：XXX</a:t>
+              <a:t>《大数据原理与应用》中期作业</a:t>
+            </a:r>
+          </a:p>
+          <a:p>
+            <a:r>
+              <a:t>组长：张艺轩  组员：徐梓涵、周宇琪、王书卿、王文莉</a:t>
             </a:r>
           </a:p>
         </p:txBody>
